--- a/dist/weeks/서비스디자인_03주차_필드리서치.pptx
+++ b/dist/weeks/서비스디자인_03주차_필드리서치.pptx
@@ -9449,7 +9449,7 @@
         <p:spPr>
           <a:xfrm>
             <a:off x="640080" y="1719072"/>
-            <a:ext cx="1600200" cy="566928"/>
+            <a:ext cx="1600200" cy="593054"/>
           </a:xfrm>
           <a:prstGeom prst="rect">
             <a:avLst/>
@@ -9488,7 +9488,7 @@
         <p:spPr>
           <a:xfrm>
             <a:off x="2377440" y="1719072"/>
-            <a:ext cx="6888175" cy="566928"/>
+            <a:ext cx="6888175" cy="593054"/>
           </a:xfrm>
           <a:prstGeom prst="rect">
             <a:avLst/>
@@ -9527,7 +9527,7 @@
         <p:spPr>
           <a:xfrm>
             <a:off x="9265615" y="1719072"/>
-            <a:ext cx="2286000" cy="566928"/>
+            <a:ext cx="2286000" cy="593054"/>
           </a:xfrm>
           <a:prstGeom prst="rect">
             <a:avLst/>
@@ -9565,7 +9565,7 @@
         </p:nvSpPr>
         <p:spPr>
           <a:xfrm>
-            <a:off x="640080" y="2267712"/>
+            <a:off x="640080" y="2293838"/>
             <a:ext cx="10911535" cy="9144"/>
           </a:xfrm>
           <a:prstGeom prst="rect">
@@ -9590,8 +9590,8 @@
         </p:nvSpPr>
         <p:spPr>
           <a:xfrm>
-            <a:off x="640080" y="2286000"/>
-            <a:ext cx="1600200" cy="566928"/>
+            <a:off x="640080" y="2312126"/>
+            <a:ext cx="1600200" cy="593054"/>
           </a:xfrm>
           <a:prstGeom prst="rect">
             <a:avLst/>
@@ -9629,8 +9629,8 @@
         </p:nvSpPr>
         <p:spPr>
           <a:xfrm>
-            <a:off x="2377440" y="2286000"/>
-            <a:ext cx="6888175" cy="566928"/>
+            <a:off x="2377440" y="2312126"/>
+            <a:ext cx="6888175" cy="593054"/>
           </a:xfrm>
           <a:prstGeom prst="rect">
             <a:avLst/>
@@ -9668,8 +9668,8 @@
         </p:nvSpPr>
         <p:spPr>
           <a:xfrm>
-            <a:off x="9265615" y="2286000"/>
-            <a:ext cx="2286000" cy="566928"/>
+            <a:off x="9265615" y="2312126"/>
+            <a:ext cx="2286000" cy="593054"/>
           </a:xfrm>
           <a:prstGeom prst="rect">
             <a:avLst/>
@@ -9707,7 +9707,7 @@
         </p:nvSpPr>
         <p:spPr>
           <a:xfrm>
-            <a:off x="640080" y="2834640"/>
+            <a:off x="640080" y="2886891"/>
             <a:ext cx="10911535" cy="9144"/>
           </a:xfrm>
           <a:prstGeom prst="rect">
@@ -9732,8 +9732,8 @@
         </p:nvSpPr>
         <p:spPr>
           <a:xfrm>
-            <a:off x="640080" y="2852928"/>
-            <a:ext cx="1600200" cy="566928"/>
+            <a:off x="640080" y="2905179"/>
+            <a:ext cx="1600200" cy="593054"/>
           </a:xfrm>
           <a:prstGeom prst="rect">
             <a:avLst/>
@@ -9771,8 +9771,8 @@
         </p:nvSpPr>
         <p:spPr>
           <a:xfrm>
-            <a:off x="2377440" y="2852928"/>
-            <a:ext cx="6888175" cy="566928"/>
+            <a:off x="2377440" y="2905179"/>
+            <a:ext cx="6888175" cy="593054"/>
           </a:xfrm>
           <a:prstGeom prst="rect">
             <a:avLst/>
@@ -9810,7 +9810,7 @@
         </p:nvSpPr>
         <p:spPr>
           <a:xfrm>
-            <a:off x="640080" y="3401568"/>
+            <a:off x="640080" y="3479945"/>
             <a:ext cx="10911535" cy="9144"/>
           </a:xfrm>
           <a:prstGeom prst="rect">
@@ -9835,8 +9835,8 @@
         </p:nvSpPr>
         <p:spPr>
           <a:xfrm>
-            <a:off x="640080" y="3419856"/>
-            <a:ext cx="1600200" cy="566928"/>
+            <a:off x="640080" y="3498233"/>
+            <a:ext cx="1600200" cy="593054"/>
           </a:xfrm>
           <a:prstGeom prst="rect">
             <a:avLst/>
@@ -9874,8 +9874,8 @@
         </p:nvSpPr>
         <p:spPr>
           <a:xfrm>
-            <a:off x="2377440" y="3419856"/>
-            <a:ext cx="6888175" cy="566928"/>
+            <a:off x="2377440" y="3498233"/>
+            <a:ext cx="6888175" cy="593054"/>
           </a:xfrm>
           <a:prstGeom prst="rect">
             <a:avLst/>
@@ -9913,8 +9913,8 @@
         </p:nvSpPr>
         <p:spPr>
           <a:xfrm>
-            <a:off x="9265615" y="3419856"/>
-            <a:ext cx="2286000" cy="566928"/>
+            <a:off x="9265615" y="3498233"/>
+            <a:ext cx="2286000" cy="593054"/>
           </a:xfrm>
           <a:prstGeom prst="rect">
             <a:avLst/>
@@ -9952,7 +9952,7 @@
         </p:nvSpPr>
         <p:spPr>
           <a:xfrm>
-            <a:off x="640080" y="3968496"/>
+            <a:off x="640080" y="4072999"/>
             <a:ext cx="10911535" cy="9144"/>
           </a:xfrm>
           <a:prstGeom prst="rect">
@@ -9977,8 +9977,8 @@
         </p:nvSpPr>
         <p:spPr>
           <a:xfrm>
-            <a:off x="640080" y="3986784"/>
-            <a:ext cx="1600200" cy="566928"/>
+            <a:off x="640080" y="4091287"/>
+            <a:ext cx="1600200" cy="593054"/>
           </a:xfrm>
           <a:prstGeom prst="rect">
             <a:avLst/>
@@ -10016,8 +10016,8 @@
         </p:nvSpPr>
         <p:spPr>
           <a:xfrm>
-            <a:off x="2377440" y="3986784"/>
-            <a:ext cx="6888175" cy="566928"/>
+            <a:off x="2377440" y="4091287"/>
+            <a:ext cx="6888175" cy="593054"/>
           </a:xfrm>
           <a:prstGeom prst="rect">
             <a:avLst/>
@@ -10055,7 +10055,7 @@
         </p:nvSpPr>
         <p:spPr>
           <a:xfrm>
-            <a:off x="640080" y="4535424"/>
+            <a:off x="640080" y="4666053"/>
             <a:ext cx="10911535" cy="9144"/>
           </a:xfrm>
           <a:prstGeom prst="rect">
@@ -10080,8 +10080,8 @@
         </p:nvSpPr>
         <p:spPr>
           <a:xfrm>
-            <a:off x="640080" y="4553712"/>
-            <a:ext cx="1600200" cy="566928"/>
+            <a:off x="640080" y="4684341"/>
+            <a:ext cx="1600200" cy="593054"/>
           </a:xfrm>
           <a:prstGeom prst="rect">
             <a:avLst/>
@@ -10119,8 +10119,8 @@
         </p:nvSpPr>
         <p:spPr>
           <a:xfrm>
-            <a:off x="2377440" y="4553712"/>
-            <a:ext cx="6888175" cy="566928"/>
+            <a:off x="2377440" y="4684341"/>
+            <a:ext cx="6888175" cy="593054"/>
           </a:xfrm>
           <a:prstGeom prst="rect">
             <a:avLst/>
@@ -10158,8 +10158,8 @@
         </p:nvSpPr>
         <p:spPr>
           <a:xfrm>
-            <a:off x="9265615" y="4553712"/>
-            <a:ext cx="2286000" cy="566928"/>
+            <a:off x="9265615" y="4684341"/>
+            <a:ext cx="2286000" cy="593054"/>
           </a:xfrm>
           <a:prstGeom prst="rect">
             <a:avLst/>
@@ -10197,7 +10197,7 @@
         </p:nvSpPr>
         <p:spPr>
           <a:xfrm>
-            <a:off x="640080" y="5102352"/>
+            <a:off x="640080" y="5259106"/>
             <a:ext cx="10911535" cy="9144"/>
           </a:xfrm>
           <a:prstGeom prst="rect">
@@ -10222,8 +10222,8 @@
         </p:nvSpPr>
         <p:spPr>
           <a:xfrm>
-            <a:off x="640080" y="5120640"/>
-            <a:ext cx="1600200" cy="566928"/>
+            <a:off x="640080" y="5277394"/>
+            <a:ext cx="1600200" cy="593054"/>
           </a:xfrm>
           <a:prstGeom prst="rect">
             <a:avLst/>
@@ -10261,8 +10261,8 @@
         </p:nvSpPr>
         <p:spPr>
           <a:xfrm>
-            <a:off x="2377440" y="5120640"/>
-            <a:ext cx="6888175" cy="566928"/>
+            <a:off x="2377440" y="5277394"/>
+            <a:ext cx="6888175" cy="593054"/>
           </a:xfrm>
           <a:prstGeom prst="rect">
             <a:avLst/>
@@ -10300,8 +10300,8 @@
         </p:nvSpPr>
         <p:spPr>
           <a:xfrm>
-            <a:off x="9265615" y="5120640"/>
-            <a:ext cx="2286000" cy="566928"/>
+            <a:off x="9265615" y="5277394"/>
+            <a:ext cx="2286000" cy="593054"/>
           </a:xfrm>
           <a:prstGeom prst="rect">
             <a:avLst/>
